--- a/demo/slides.pptx
+++ b/demo/slides.pptx
@@ -8728,7 +8728,7 @@
                 </a:solidFill>
                 <a:latin typeface="Segoe UI"/>
               </a:rPr>
-              <a:t>Managed node group, t3.medium workers</a:t>
+              <a:t>Managed node group, t3.small workers</a:t>
             </a:r>
           </a:p>
           <a:p>
